--- a/slides/Week09_Read_Numbers_v1.1.pptx
+++ b/slides/Week09_Read_Numbers_v1.1.pptx
@@ -2072,7 +2072,7 @@
 </file>
 
 <file path=ppt/slideMasters/slideMaster1.xml><?xml version="1.0" encoding="utf-8"?>
-<p:sldMaster xmlns:a="http://schemas.openxmlformats.org/drawingml/2006/main" xmlns:r="http://schemas.openxmlformats.org/officeDocument/2006/relationships" xmlns:p="http://schemas.openxmlformats.org/presentationml/2006/main">
+<p:sldMaster xmlns:a="http://schemas.openxmlformats.org/drawingml/2006/main" xmlns:ns3="http://schemas.microsoft.com/office/drawing/2014/main" xmlns:p="http://schemas.openxmlformats.org/presentationml/2006/main" xmlns:r="http://schemas.openxmlformats.org/officeDocument/2006/relationships">
   <p:cSld>
     <p:spTree>
       <p:nvGrpSpPr>
@@ -2088,6 +2088,85 @@
           <a:chExt cx="0" cy="0"/>
         </a:xfrm>
       </p:grpSpPr>
+      <p:pic>
+        <p:nvPicPr>
+          <p:cNvPr id="2" name=""/>
+          <p:cNvPicPr>
+            <a:picLocks noChangeAspect="1"/>
+          </p:cNvPicPr>
+          <p:nvPr/>
+        </p:nvPicPr>
+        <p:blipFill>
+          <a:blip r:embed="rIdPersonalAuthorLogo"/>
+          <a:stretch/>
+        </p:blipFill>
+        <p:spPr>
+          <a:xfrm>
+            <a:off x="685800" y="85748"/>
+            <a:ext cx="1714500" cy="210457"/>
+          </a:xfrm>
+          <a:prstGeom prst="rect">
+            <a:avLst/>
+          </a:prstGeom>
+        </p:spPr>
+      </p:pic>
+      <p:sp>
+        <p:nvSpPr>
+          <p:cNvPr id="3" name="Personal author website">
+            <a:extLst>
+              <a:ext uri="{FF2B5EF4-FFF2-40B4-BE49-F238E27FC236}">
+                <ns3:creationId id="{2B199CB2-0940-4D13-9CAC-E3F074FAA0ED}"/>
+              </a:ext>
+            </a:extLst>
+          </p:cNvPr>
+          <p:cNvSpPr>
+            <a:spLocks noGrp="1"/>
+          </p:cNvSpPr>
+          <p:nvPr/>
+        </p:nvSpPr>
+        <p:spPr>
+          <a:xfrm>
+            <a:off x="6286500" y="6477000"/>
+            <a:ext cx="4000500" cy="266700"/>
+          </a:xfrm>
+          <a:prstGeom prst="rect">
+            <a:avLst/>
+          </a:prstGeom>
+          <a:noFill/>
+          <a:ln w="0">
+            <a:noFill/>
+          </a:ln>
+        </p:spPr>
+        <p:txBody>
+          <a:bodyPr>
+            <a:noAutofit/>
+          </a:bodyPr>
+          <a:lstStyle/>
+          <a:p>
+            <a:pPr>
+              <a:defRPr sz="1800">
+                <a:solidFill>
+                  <a:srgbClr val="607482"/>
+                </a:solidFill>
+                <a:latin typeface="Meiryo"/>
+                <a:ea typeface="Meiryo"/>
+                <a:cs typeface="Meiryo"/>
+              </a:defRPr>
+            </a:pPr>
+            <a:r>
+              <a:rPr sz="1800">
+                <a:solidFill>
+                  <a:srgbClr val="607482"/>
+                </a:solidFill>
+                <a:latin typeface="Meiryo"/>
+                <a:ea typeface="Meiryo"/>
+                <a:cs typeface="Meiryo"/>
+              </a:rPr>
+              <a:t>tsuchiyatakahiro.com</a:t>
+            </a:r>
+          </a:p>
+        </p:txBody>
+      </p:sp>
     </p:spTree>
   </p:cSld>
   <p:clrMap bg1="lt1" tx1="dk1" bg2="lt2" tx2="dk2" accent1="accent1" accent2="accent2" accent3="accent3" accent4="accent4" accent5="accent5" accent6="accent6" hlink="hlink" folHlink="folHlink"/>
@@ -2353,7 +2432,7 @@
 </file>
 
 <file path=ppt/slides/slide1.xml><?xml version="1.0" encoding="utf-8"?>
-<p:sld xmlns:a="http://schemas.openxmlformats.org/drawingml/2006/main" xmlns:r="http://schemas.openxmlformats.org/officeDocument/2006/relationships" xmlns:p="http://schemas.openxmlformats.org/presentationml/2006/main">
+<p:sld xmlns:a="http://schemas.openxmlformats.org/drawingml/2006/main" xmlns:ns3="http://schemas.microsoft.com/office/drawing/2014/main" xmlns:p="http://schemas.openxmlformats.org/presentationml/2006/main" xmlns:r="http://schemas.openxmlformats.org/officeDocument/2006/relationships">
   <p:cSld name="Slide 1">
     <p:bg>
       <p:bgPr>
@@ -2679,6 +2758,115 @@
               <a:ea typeface="Meiryo"/>
               <a:cs typeface="Meiryo"/>
             </a:endParaRPr>
+          </a:p>
+        </p:txBody>
+      </p:sp>
+      <p:sp>
+        <p:nvSpPr>
+          <p:cNvPr id="9" name="Personal logo white backplate">
+            <a:extLst>
+              <a:ext uri="{FF2B5EF4-FFF2-40B4-BE49-F238E27FC236}">
+                <ns3:creationId id="{1464D463-E5BC-4BFE-BD8A-CDCFE345671F}"/>
+              </a:ext>
+            </a:extLst>
+          </p:cNvPr>
+          <p:cNvSpPr>
+            <a:spLocks noGrp="1"/>
+          </p:cNvSpPr>
+          <p:nvPr/>
+        </p:nvSpPr>
+        <p:spPr>
+          <a:xfrm>
+            <a:off x="685800" y="85725"/>
+            <a:ext cx="1714500" cy="210503"/>
+          </a:xfrm>
+          <a:prstGeom prst="rect">
+            <a:avLst/>
+          </a:prstGeom>
+          <a:solidFill>
+            <a:srgbClr val="FFFFFF"/>
+          </a:solidFill>
+          <a:ln w="0">
+            <a:noFill/>
+          </a:ln>
+        </p:spPr>
+      </p:sp>
+      <p:pic>
+        <p:nvPicPr>
+          <p:cNvPr id="10" name=""/>
+          <p:cNvPicPr>
+            <a:picLocks noChangeAspect="1"/>
+          </p:cNvPicPr>
+          <p:nvPr/>
+        </p:nvPicPr>
+        <p:blipFill>
+          <a:blip r:embed="rIdPersonalAuthorLogo"/>
+          <a:stretch/>
+        </p:blipFill>
+        <p:spPr>
+          <a:xfrm>
+            <a:off x="685800" y="85748"/>
+            <a:ext cx="1714500" cy="210457"/>
+          </a:xfrm>
+          <a:prstGeom prst="rect">
+            <a:avLst/>
+          </a:prstGeom>
+        </p:spPr>
+      </p:pic>
+      <p:sp>
+        <p:nvSpPr>
+          <p:cNvPr id="11" name="Personal author website">
+            <a:extLst>
+              <a:ext uri="{FF2B5EF4-FFF2-40B4-BE49-F238E27FC236}">
+                <ns3:creationId id="{2B199CB2-0940-4D13-9CAC-E3F074FAA0ED}"/>
+              </a:ext>
+            </a:extLst>
+          </p:cNvPr>
+          <p:cNvSpPr>
+            <a:spLocks noGrp="1"/>
+          </p:cNvSpPr>
+          <p:nvPr/>
+        </p:nvSpPr>
+        <p:spPr>
+          <a:xfrm>
+            <a:off x="6286500" y="6477000"/>
+            <a:ext cx="4000500" cy="266700"/>
+          </a:xfrm>
+          <a:prstGeom prst="rect">
+            <a:avLst/>
+          </a:prstGeom>
+          <a:noFill/>
+          <a:ln w="0">
+            <a:noFill/>
+          </a:ln>
+        </p:spPr>
+        <p:txBody>
+          <a:bodyPr>
+            <a:noAutofit/>
+          </a:bodyPr>
+          <a:lstStyle/>
+          <a:p>
+            <a:pPr>
+              <a:defRPr sz="1800">
+                <a:solidFill>
+                  <a:srgbClr val="AECFD2"/>
+                </a:solidFill>
+                <a:latin typeface="Meiryo"/>
+                <a:ea typeface="Meiryo"/>
+                <a:cs typeface="Meiryo"/>
+              </a:defRPr>
+            </a:pPr>
+            <a:r>
+              <a:rPr sz="1800">
+                <a:solidFill>
+                  <a:srgbClr val="AECFD2"/>
+                </a:solidFill>
+                <a:latin typeface="Meiryo"/>
+                <a:ea typeface="Meiryo"/>
+                <a:cs typeface="Meiryo"/>
+              </a:rPr>
+              <a:t>tsuchiyatakahiro.com</a:t>
+            </a:r>
           </a:p>
         </p:txBody>
       </p:sp>

--- a/slides/Week09_Read_Numbers_v1.1.pptx
+++ b/slides/Week09_Read_Numbers_v1.1.pptx
@@ -2761,36 +2761,6 @@
           </a:p>
         </p:txBody>
       </p:sp>
-      <p:sp>
-        <p:nvSpPr>
-          <p:cNvPr id="9" name="Personal logo white backplate">
-            <a:extLst>
-              <a:ext uri="{FF2B5EF4-FFF2-40B4-BE49-F238E27FC236}">
-                <ns3:creationId id="{1464D463-E5BC-4BFE-BD8A-CDCFE345671F}"/>
-              </a:ext>
-            </a:extLst>
-          </p:cNvPr>
-          <p:cNvSpPr>
-            <a:spLocks noGrp="1"/>
-          </p:cNvSpPr>
-          <p:nvPr/>
-        </p:nvSpPr>
-        <p:spPr>
-          <a:xfrm>
-            <a:off x="685800" y="85725"/>
-            <a:ext cx="1714500" cy="210503"/>
-          </a:xfrm>
-          <a:prstGeom prst="rect">
-            <a:avLst/>
-          </a:prstGeom>
-          <a:solidFill>
-            <a:srgbClr val="FFFFFF"/>
-          </a:solidFill>
-          <a:ln w="0">
-            <a:noFill/>
-          </a:ln>
-        </p:spPr>
-      </p:sp>
       <p:pic>
         <p:nvPicPr>
           <p:cNvPr id="10" name=""/>
@@ -2800,7 +2770,12 @@
           <p:nvPr/>
         </p:nvPicPr>
         <p:blipFill>
-          <a:blip r:embed="rIdPersonalAuthorLogo"/>
+          <a:blip r:embed="rIdPersonalAuthorLogo">
+            <a:duotone>
+              <a:srgbClr val="FFFFFF"/>
+              <a:srgbClr val="FFFFFF"/>
+            </a:duotone>
+          </a:blip>
           <a:stretch/>
         </p:blipFill>
         <p:spPr>

--- a/slides/Week09_Read_Numbers_v1.1.pptx
+++ b/slides/Week09_Read_Numbers_v1.1.pptx
@@ -2432,7 +2432,7 @@
 </file>
 
 <file path=ppt/slides/slide1.xml><?xml version="1.0" encoding="utf-8"?>
-<p:sld xmlns:a="http://schemas.openxmlformats.org/drawingml/2006/main" xmlns:ns3="http://schemas.microsoft.com/office/drawing/2014/main" xmlns:p="http://schemas.openxmlformats.org/presentationml/2006/main" xmlns:r="http://schemas.openxmlformats.org/officeDocument/2006/relationships">
+<p:sld xmlns:a="http://schemas.openxmlformats.org/drawingml/2006/main" xmlns:ns3="http://schemas.microsoft.com/office/drawing/2014/main" xmlns:p="http://schemas.openxmlformats.org/presentationml/2006/main" xmlns:r="http://schemas.openxmlformats.org/officeDocument/2006/relationships" showMasterSp="0">
   <p:cSld name="Slide 1">
     <p:bg>
       <p:bgPr>
@@ -2763,25 +2763,20 @@
       </p:sp>
       <p:pic>
         <p:nvPicPr>
-          <p:cNvPr id="10" name=""/>
+          <p:cNvPr id="10" name="" descr="TSUCHIYA TAKAHIRO white logo supplied in Brandeis cover; original bytes reused"/>
           <p:cNvPicPr>
             <a:picLocks noChangeAspect="1"/>
           </p:cNvPicPr>
           <p:nvPr/>
         </p:nvPicPr>
         <p:blipFill>
-          <a:blip r:embed="rIdPersonalAuthorLogo">
-            <a:duotone>
-              <a:srgbClr val="FFFFFF"/>
-              <a:srgbClr val="FFFFFF"/>
-            </a:duotone>
-          </a:blip>
+          <a:blip r:embed="rIdPersonalAuthorLogo"/>
           <a:stretch/>
         </p:blipFill>
         <p:spPr>
           <a:xfrm>
-            <a:off x="685800" y="85748"/>
-            <a:ext cx="1714500" cy="210457"/>
+            <a:off x="3810000" y="109728"/>
+            <a:ext cx="4572000" cy="561219"/>
           </a:xfrm>
           <a:prstGeom prst="rect">
             <a:avLst/>
